--- a/pptx/09 Naïve Bayes Classifier.pptx
+++ b/pptx/09 Naïve Bayes Classifier.pptx
@@ -36,7 +36,7 @@
     <p:sldId id="276" r:id="rId27"/>
   </p:sldIdLst>
   <p:sldSz cx="12192000" cy="6858000"/>
-  <p:notesSz cx="6889750" cy="10021888"/>
+  <p:notesSz cx="6794500" cy="9931400"/>
   <p:defaultTextStyle>
     <a:defPPr>
       <a:defRPr lang="en-US"/>
@@ -212,14 +212,14 @@
         <p:spPr>
           <a:xfrm>
             <a:off x="0" y="0"/>
-            <a:ext cx="2985558" cy="502835"/>
+            <a:ext cx="2944283" cy="498295"/>
           </a:xfrm>
           <a:prstGeom prst="rect">
             <a:avLst/>
           </a:prstGeom>
         </p:spPr>
         <p:txBody>
-          <a:bodyPr vert="horz" lIns="96634" tIns="48317" rIns="96634" bIns="48317" rtlCol="0"/>
+          <a:bodyPr vert="horz" lIns="95571" tIns="47786" rIns="95571" bIns="47786" rtlCol="0"/>
           <a:lstStyle>
             <a:lvl1pPr algn="l">
               <a:defRPr sz="1300"/>
@@ -248,15 +248,15 @@
         </p:nvSpPr>
         <p:spPr>
           <a:xfrm>
-            <a:off x="3902597" y="0"/>
-            <a:ext cx="2985558" cy="502835"/>
+            <a:off x="3848644" y="0"/>
+            <a:ext cx="2944283" cy="498295"/>
           </a:xfrm>
           <a:prstGeom prst="rect">
             <a:avLst/>
           </a:prstGeom>
         </p:spPr>
         <p:txBody>
-          <a:bodyPr vert="horz" lIns="96634" tIns="48317" rIns="96634" bIns="48317" rtlCol="0"/>
+          <a:bodyPr vert="horz" lIns="95571" tIns="47786" rIns="95571" bIns="47786" rtlCol="0"/>
           <a:lstStyle>
             <a:lvl1pPr algn="r">
               <a:defRPr sz="1300"/>
@@ -265,7 +265,7 @@
           <a:p>
             <a:fld id="{058ABBF3-49A8-4B3F-9773-22E67695BB12}" type="datetimeFigureOut">
               <a:rPr lang="en-US" smtClean="0"/>
-              <a:t>8/21/2025</a:t>
+              <a:t>9/3/2025</a:t>
             </a:fld>
             <a:endParaRPr lang="en-US" dirty="0"/>
           </a:p>
@@ -289,15 +289,15 @@
         </p:nvSpPr>
         <p:spPr>
           <a:xfrm>
-            <a:off x="0" y="9519055"/>
-            <a:ext cx="2985558" cy="502834"/>
+            <a:off x="0" y="9433107"/>
+            <a:ext cx="2944283" cy="498294"/>
           </a:xfrm>
           <a:prstGeom prst="rect">
             <a:avLst/>
           </a:prstGeom>
         </p:spPr>
         <p:txBody>
-          <a:bodyPr vert="horz" lIns="96634" tIns="48317" rIns="96634" bIns="48317" rtlCol="0" anchor="b"/>
+          <a:bodyPr vert="horz" lIns="95571" tIns="47786" rIns="95571" bIns="47786" rtlCol="0" anchor="b"/>
           <a:lstStyle>
             <a:lvl1pPr algn="l">
               <a:defRPr sz="1300"/>
@@ -326,15 +326,15 @@
         </p:nvSpPr>
         <p:spPr>
           <a:xfrm>
-            <a:off x="3902597" y="9519055"/>
-            <a:ext cx="2985558" cy="502834"/>
+            <a:off x="3848644" y="9433107"/>
+            <a:ext cx="2944283" cy="498294"/>
           </a:xfrm>
           <a:prstGeom prst="rect">
             <a:avLst/>
           </a:prstGeom>
         </p:spPr>
         <p:txBody>
-          <a:bodyPr vert="horz" lIns="96634" tIns="48317" rIns="96634" bIns="48317" rtlCol="0" anchor="b"/>
+          <a:bodyPr vert="horz" lIns="95571" tIns="47786" rIns="95571" bIns="47786" rtlCol="0" anchor="b"/>
           <a:lstStyle>
             <a:lvl1pPr algn="r">
               <a:defRPr sz="1300"/>
@@ -395,14 +395,14 @@
         <p:spPr>
           <a:xfrm>
             <a:off x="0" y="0"/>
-            <a:ext cx="2985558" cy="502835"/>
+            <a:ext cx="2944283" cy="498295"/>
           </a:xfrm>
           <a:prstGeom prst="rect">
             <a:avLst/>
           </a:prstGeom>
         </p:spPr>
         <p:txBody>
-          <a:bodyPr vert="horz" lIns="96634" tIns="48317" rIns="96634" bIns="48317" rtlCol="0"/>
+          <a:bodyPr vert="horz" lIns="95571" tIns="47786" rIns="95571" bIns="47786" rtlCol="0"/>
           <a:lstStyle>
             <a:lvl1pPr algn="l">
               <a:defRPr sz="1300"/>
@@ -425,15 +425,15 @@
         </p:nvSpPr>
         <p:spPr>
           <a:xfrm>
-            <a:off x="3902597" y="0"/>
-            <a:ext cx="2985558" cy="502835"/>
+            <a:off x="3848644" y="0"/>
+            <a:ext cx="2944283" cy="498295"/>
           </a:xfrm>
           <a:prstGeom prst="rect">
             <a:avLst/>
           </a:prstGeom>
         </p:spPr>
         <p:txBody>
-          <a:bodyPr vert="horz" lIns="96634" tIns="48317" rIns="96634" bIns="48317" rtlCol="0"/>
+          <a:bodyPr vert="horz" lIns="95571" tIns="47786" rIns="95571" bIns="47786" rtlCol="0"/>
           <a:lstStyle>
             <a:lvl1pPr algn="r">
               <a:defRPr sz="1300"/>
@@ -442,7 +442,7 @@
           <a:p>
             <a:fld id="{F44AAC2B-A50D-4386-849A-6B59FB991B4C}" type="datetimeFigureOut">
               <a:rPr lang="en-US" smtClean="0"/>
-              <a:t>8/21/2025</a:t>
+              <a:t>9/3/2025</a:t>
             </a:fld>
             <a:endParaRPr lang="en-US" dirty="0"/>
           </a:p>
@@ -460,8 +460,8 @@
         </p:nvSpPr>
         <p:spPr>
           <a:xfrm>
-            <a:off x="438150" y="1252538"/>
-            <a:ext cx="6013450" cy="3382962"/>
+            <a:off x="417513" y="1241425"/>
+            <a:ext cx="5959475" cy="3352800"/>
           </a:xfrm>
           <a:prstGeom prst="rect">
             <a:avLst/>
@@ -474,7 +474,7 @@
           </a:ln>
         </p:spPr>
         <p:txBody>
-          <a:bodyPr vert="horz" lIns="96634" tIns="48317" rIns="96634" bIns="48317" rtlCol="0" anchor="ctr"/>
+          <a:bodyPr vert="horz" lIns="95571" tIns="47786" rIns="95571" bIns="47786" rtlCol="0" anchor="ctr"/>
           <a:lstStyle/>
           <a:p>
             <a:endParaRPr lang="en-US" dirty="0"/>
@@ -493,15 +493,15 @@
         </p:nvSpPr>
         <p:spPr>
           <a:xfrm>
-            <a:off x="688975" y="4823034"/>
-            <a:ext cx="5511800" cy="3946118"/>
+            <a:off x="679450" y="4779487"/>
+            <a:ext cx="5435600" cy="3910488"/>
           </a:xfrm>
           <a:prstGeom prst="rect">
             <a:avLst/>
           </a:prstGeom>
         </p:spPr>
         <p:txBody>
-          <a:bodyPr vert="horz" lIns="96634" tIns="48317" rIns="96634" bIns="48317" rtlCol="0"/>
+          <a:bodyPr vert="horz" lIns="95571" tIns="47786" rIns="95571" bIns="47786" rtlCol="0"/>
           <a:lstStyle/>
           <a:p>
             <a:pPr lvl="0"/>
@@ -552,15 +552,15 @@
         </p:nvSpPr>
         <p:spPr>
           <a:xfrm>
-            <a:off x="0" y="9519055"/>
-            <a:ext cx="2985558" cy="502834"/>
+            <a:off x="0" y="9433107"/>
+            <a:ext cx="2944283" cy="498294"/>
           </a:xfrm>
           <a:prstGeom prst="rect">
             <a:avLst/>
           </a:prstGeom>
         </p:spPr>
         <p:txBody>
-          <a:bodyPr vert="horz" lIns="96634" tIns="48317" rIns="96634" bIns="48317" rtlCol="0" anchor="b"/>
+          <a:bodyPr vert="horz" lIns="95571" tIns="47786" rIns="95571" bIns="47786" rtlCol="0" anchor="b"/>
           <a:lstStyle>
             <a:lvl1pPr algn="l">
               <a:defRPr sz="1300"/>
@@ -583,15 +583,15 @@
         </p:nvSpPr>
         <p:spPr>
           <a:xfrm>
-            <a:off x="3902597" y="9519055"/>
-            <a:ext cx="2985558" cy="502834"/>
+            <a:off x="3848644" y="9433107"/>
+            <a:ext cx="2944283" cy="498294"/>
           </a:xfrm>
           <a:prstGeom prst="rect">
             <a:avLst/>
           </a:prstGeom>
         </p:spPr>
         <p:txBody>
-          <a:bodyPr vert="horz" lIns="96634" tIns="48317" rIns="96634" bIns="48317" rtlCol="0" anchor="b"/>
+          <a:bodyPr vert="horz" lIns="95571" tIns="47786" rIns="95571" bIns="47786" rtlCol="0" anchor="b"/>
           <a:lstStyle>
             <a:lvl1pPr algn="r">
               <a:defRPr sz="1300"/>
@@ -2418,8 +2418,8 @@
         </p:nvSpPr>
         <p:spPr>
           <a:xfrm>
-            <a:off x="381000" y="685800"/>
-            <a:ext cx="6096000" cy="3429000"/>
+            <a:off x="361950" y="679450"/>
+            <a:ext cx="6040438" cy="3398838"/>
           </a:xfrm>
           <a:custGeom>
             <a:avLst/>
@@ -2459,28 +2459,19 @@
         </p:nvSpPr>
         <p:spPr>
           <a:xfrm>
-            <a:off x="685800" y="4343400"/>
-            <a:ext cx="5486400" cy="4114800"/>
+            <a:off x="676319" y="4304183"/>
+            <a:ext cx="5410551" cy="4077647"/>
           </a:xfrm>
           <a:prstGeom prst="rect">
             <a:avLst/>
           </a:prstGeom>
         </p:spPr>
         <p:txBody>
-          <a:bodyPr spcFirstLastPara="1" wrap="square" lIns="91425" tIns="91425" rIns="91425" bIns="91425" anchor="t" anchorCtr="0">
+          <a:bodyPr spcFirstLastPara="1" wrap="square" lIns="90419" tIns="90419" rIns="90419" bIns="90419" anchor="t" anchorCtr="0">
             <a:noAutofit/>
           </a:bodyPr>
           <a:lstStyle/>
           <a:p>
-            <a:pPr marL="0" lvl="0" indent="0" algn="l" rtl="0">
-              <a:spcBef>
-                <a:spcPts val="0"/>
-              </a:spcBef>
-              <a:spcAft>
-                <a:spcPts val="0"/>
-              </a:spcAft>
-              <a:buNone/>
-            </a:pPr>
             <a:endParaRPr/>
           </a:p>
         </p:txBody>
@@ -10607,7 +10598,7 @@
           <a:p>
             <a:fld id="{4509A250-FF31-4206-8172-F9D3106AACB1}" type="datetimeFigureOut">
               <a:rPr lang="en-US" smtClean="0"/>
-              <a:t>8/21/2025</a:t>
+              <a:t>9/3/2025</a:t>
             </a:fld>
             <a:endParaRPr lang="en-US" dirty="0"/>
           </a:p>
@@ -20587,9 +20578,36 @@
                     <a:lumMod val="75000"/>
                   </a:schemeClr>
                 </a:solidFill>
+              </a:rPr>
+              <a:t>Prediction of </a:t>
+            </a:r>
+            <a:r>
+              <a:rPr lang="en-US" b="1" dirty="0">
+                <a:solidFill>
+                  <a:schemeClr val="accent5">
+                    <a:lumMod val="75000"/>
+                  </a:schemeClr>
+                </a:solidFill>
                 <a:latin typeface="+mj-lt"/>
               </a:rPr>
-              <a:t>New Email for Prediction (Final Exam Question)</a:t>
+              <a:t>New Email </a:t>
+            </a:r>
+          </a:p>
+          <a:p>
+            <a:pPr marL="285750" indent="-285750">
+              <a:buFont typeface="Arial" panose="020B0604020202020204" pitchFamily="34" charset="0"/>
+              <a:buChar char="•"/>
+            </a:pPr>
+            <a:r>
+              <a:rPr lang="en-US" b="1" dirty="0">
+                <a:solidFill>
+                  <a:schemeClr val="accent5">
+                    <a:lumMod val="75000"/>
+                  </a:schemeClr>
+                </a:solidFill>
+                <a:latin typeface="+mj-lt"/>
+              </a:rPr>
+              <a:t>(Final Exam Question)</a:t>
             </a:r>
           </a:p>
         </p:txBody>
@@ -22298,7 +22316,7 @@
 </file>
 
 <file path=ppt/slides/slide2.xml><?xml version="1.0" encoding="utf-8"?>
-<p:sld xmlns:a="http://schemas.openxmlformats.org/drawingml/2006/main" xmlns:r="http://schemas.openxmlformats.org/officeDocument/2006/relationships" xmlns:p="http://schemas.openxmlformats.org/presentationml/2006/main">
+<p:sld xmlns:a="http://schemas.openxmlformats.org/drawingml/2006/main" xmlns:r="http://schemas.openxmlformats.org/officeDocument/2006/relationships" xmlns:p="http://schemas.openxmlformats.org/presentationml/2006/main" show="0">
   <p:cSld>
     <p:bg>
       <p:bgPr>
@@ -26587,6 +26605,56 @@
       </p:grpSpPr>
       <p:sp>
         <p:nvSpPr>
+          <p:cNvPr id="15" name="Title 14">
+            <a:extLst>
+              <a:ext uri="{FF2B5EF4-FFF2-40B4-BE49-F238E27FC236}">
+                <a16:creationId xmlns:a16="http://schemas.microsoft.com/office/drawing/2014/main" id="{56F8BEA0-8E83-7800-A0C0-641179975671}"/>
+              </a:ext>
+            </a:extLst>
+          </p:cNvPr>
+          <p:cNvSpPr>
+            <a:spLocks noGrp="1"/>
+          </p:cNvSpPr>
+          <p:nvPr>
+            <p:ph type="title"/>
+          </p:nvPr>
+        </p:nvSpPr>
+        <p:spPr/>
+        <p:txBody>
+          <a:bodyPr/>
+          <a:lstStyle/>
+          <a:p>
+            <a:endParaRPr lang="en-US"/>
+          </a:p>
+        </p:txBody>
+      </p:sp>
+      <p:sp>
+        <p:nvSpPr>
+          <p:cNvPr id="16" name="Content Placeholder 15">
+            <a:extLst>
+              <a:ext uri="{FF2B5EF4-FFF2-40B4-BE49-F238E27FC236}">
+                <a16:creationId xmlns:a16="http://schemas.microsoft.com/office/drawing/2014/main" id="{0F884ACC-3499-720C-C4CE-3C54AC7ED69A}"/>
+              </a:ext>
+            </a:extLst>
+          </p:cNvPr>
+          <p:cNvSpPr>
+            <a:spLocks noGrp="1"/>
+          </p:cNvSpPr>
+          <p:nvPr>
+            <p:ph idx="1"/>
+          </p:nvPr>
+        </p:nvSpPr>
+        <p:spPr/>
+        <p:txBody>
+          <a:bodyPr/>
+          <a:lstStyle/>
+          <a:p>
+            <a:endParaRPr lang="en-US"/>
+          </a:p>
+        </p:txBody>
+      </p:sp>
+      <p:sp>
+        <p:nvSpPr>
           <p:cNvPr id="3" name="Slide Number Placeholder 2">
             <a:extLst>
               <a:ext uri="{FF2B5EF4-FFF2-40B4-BE49-F238E27FC236}">
@@ -26601,30 +26669,17 @@
             <p:ph type="sldNum" sz="quarter" idx="12"/>
           </p:nvPr>
         </p:nvSpPr>
-        <p:spPr>
-          <a:xfrm>
-            <a:off x="11266986" y="6343287"/>
-            <a:ext cx="457200" cy="365125"/>
-          </a:xfrm>
-        </p:spPr>
+        <p:spPr/>
         <p:txBody>
           <a:bodyPr/>
           <a:lstStyle/>
           <a:p>
             <a:fld id="{B5CEABB6-07DC-46E8-9B57-56EC44A396E5}" type="slidenum">
-              <a:rPr lang="en-US" sz="1400" smtClean="0">
-                <a:solidFill>
-                  <a:srgbClr val="FF0000"/>
-                </a:solidFill>
-              </a:rPr>
+              <a:rPr lang="en-US" smtClean="0"/>
               <a:pPr/>
               <a:t>4</a:t>
             </a:fld>
-            <a:endParaRPr lang="en-US" sz="1400" dirty="0">
-              <a:solidFill>
-                <a:srgbClr val="FF0000"/>
-              </a:solidFill>
-            </a:endParaRPr>
+            <a:endParaRPr lang="en-US" dirty="0"/>
           </a:p>
         </p:txBody>
       </p:sp>
@@ -26793,8 +26848,8 @@
         </p:nvSpPr>
         <p:spPr>
           <a:xfrm>
-            <a:off x="1513489" y="2000466"/>
-            <a:ext cx="8538815" cy="2031325"/>
+            <a:off x="1479749" y="2372556"/>
+            <a:ext cx="8538815" cy="2862322"/>
           </a:xfrm>
           <a:prstGeom prst="rect">
             <a:avLst/>
@@ -26841,6 +26896,16 @@
               </a:rPr>
               <a:t>The Naïve Bayes classifier is a supervised machine learning algorithm that is used for classification tasks such as text classification. They use principles of probability to perform classification tasks.</a:t>
             </a:r>
+          </a:p>
+          <a:p>
+            <a:pPr algn="just" fontAlgn="base"/>
+            <a:endParaRPr lang="en-US" b="0" i="0" dirty="0">
+              <a:solidFill>
+                <a:srgbClr val="161616"/>
+              </a:solidFill>
+              <a:effectLst/>
+              <a:latin typeface="+mj-lt"/>
+            </a:endParaRPr>
           </a:p>
           <a:p>
             <a:pPr algn="just" fontAlgn="base"/>
@@ -29729,15 +29794,6 @@
 </file>
 
 <file path=customXml/item1.xml><?xml version="1.0" encoding="utf-8"?>
-<?mso-contentType ?>
-<FormTemplates xmlns="http://schemas.microsoft.com/sharepoint/v3/contenttype/forms">
-  <Display>DocumentLibraryForm</Display>
-  <Edit>DocumentLibraryForm</Edit>
-  <New>DocumentLibraryForm</New>
-</FormTemplates>
-</file>
-
-<file path=customXml/item2.xml><?xml version="1.0" encoding="utf-8"?>
 <ct:contentTypeSchema xmlns:ct="http://schemas.microsoft.com/office/2006/metadata/contentType" xmlns:ma="http://schemas.microsoft.com/office/2006/metadata/properties/metaAttributes" ct:_="" ma:_="" ma:contentTypeName="Document" ma:contentTypeID="0x01010079F111ED35F8CC479449609E8A0923A6" ma:contentTypeVersion="28" ma:contentTypeDescription="Create a new document." ma:contentTypeScope="" ma:versionID="60f5a4f2d2b0abadcf532d48ebf9cb71">
   <xsd:schema xmlns:xsd="http://www.w3.org/2001/XMLSchema" xmlns:xs="http://www.w3.org/2001/XMLSchema" xmlns:p="http://schemas.microsoft.com/office/2006/metadata/properties" xmlns:ns1="http://schemas.microsoft.com/sharepoint/v3" xmlns:ns2="71af3243-3dd4-4a8d-8c0d-dd76da1f02a5" xmlns:ns3="16c05727-aa75-4e4a-9b5f-8a80a1165891" xmlns:ns4="230e9df3-be65-4c73-a93b-d1236ebd677e" targetNamespace="http://schemas.microsoft.com/office/2006/metadata/properties" ma:root="true" ma:fieldsID="7dd78129e6a1811f84807ad11c651531" ns1:_="" ns2:_="" ns3:_="" ns4:_="">
     <xsd:import namespace="http://schemas.microsoft.com/sharepoint/v3"/>
@@ -30049,6 +30105,15 @@
 </ct:contentTypeSchema>
 </file>
 
+<file path=customXml/item2.xml><?xml version="1.0" encoding="utf-8"?>
+<?mso-contentType ?>
+<FormTemplates xmlns="http://schemas.microsoft.com/sharepoint/v3/contenttype/forms">
+  <Display>DocumentLibraryForm</Display>
+  <Edit>DocumentLibraryForm</Edit>
+  <New>DocumentLibraryForm</New>
+</FormTemplates>
+</file>
+
 <file path=customXml/item3.xml><?xml version="1.0" encoding="utf-8"?>
 <p:properties xmlns:p="http://schemas.microsoft.com/office/2006/metadata/properties" xmlns:xsi="http://www.w3.org/2001/XMLSchema-instance" xmlns:pc="http://schemas.microsoft.com/office/infopath/2007/PartnerControls">
   <documentManagement>
@@ -30070,14 +30135,6 @@
 </file>
 
 <file path=customXml/itemProps1.xml><?xml version="1.0" encoding="utf-8"?>
-<ds:datastoreItem xmlns:ds="http://schemas.openxmlformats.org/officeDocument/2006/customXml" ds:itemID="{8451406B-581B-4C29-A833-E33D8A6AB075}">
-  <ds:schemaRefs>
-    <ds:schemaRef ds:uri="http://schemas.microsoft.com/sharepoint/v3/contenttype/forms"/>
-  </ds:schemaRefs>
-</ds:datastoreItem>
-</file>
-
-<file path=customXml/itemProps2.xml><?xml version="1.0" encoding="utf-8"?>
 <ds:datastoreItem xmlns:ds="http://schemas.openxmlformats.org/officeDocument/2006/customXml" ds:itemID="{18903D25-5BE2-4D9E-B7D8-BE1DCAE2DC41}">
   <ds:schemaRefs>
     <ds:schemaRef ds:uri="http://schemas.microsoft.com/office/2006/metadata/contentType"/>
@@ -30098,21 +30155,29 @@
 </ds:datastoreItem>
 </file>
 
+<file path=customXml/itemProps2.xml><?xml version="1.0" encoding="utf-8"?>
+<ds:datastoreItem xmlns:ds="http://schemas.openxmlformats.org/officeDocument/2006/customXml" ds:itemID="{8451406B-581B-4C29-A833-E33D8A6AB075}">
+  <ds:schemaRefs>
+    <ds:schemaRef ds:uri="http://schemas.microsoft.com/sharepoint/v3/contenttype/forms"/>
+  </ds:schemaRefs>
+</ds:datastoreItem>
+</file>
+
 <file path=customXml/itemProps3.xml><?xml version="1.0" encoding="utf-8"?>
 <ds:datastoreItem xmlns:ds="http://schemas.openxmlformats.org/officeDocument/2006/customXml" ds:itemID="{0F65614A-92F9-4391-AC3D-F3F5B0704F99}">
   <ds:schemaRefs>
+    <ds:schemaRef ds:uri="http://schemas.microsoft.com/office/2006/documentManagement/types"/>
     <ds:schemaRef ds:uri="http://purl.org/dc/terms/"/>
     <ds:schemaRef ds:uri="http://purl.org/dc/dcmitype/"/>
+    <ds:schemaRef ds:uri="71af3243-3dd4-4a8d-8c0d-dd76da1f02a5"/>
+    <ds:schemaRef ds:uri="http://schemas.microsoft.com/sharepoint/v3"/>
+    <ds:schemaRef ds:uri="16c05727-aa75-4e4a-9b5f-8a80a1165891"/>
+    <ds:schemaRef ds:uri="http://schemas.microsoft.com/office/infopath/2007/PartnerControls"/>
+    <ds:schemaRef ds:uri="http://www.w3.org/XML/1998/namespace"/>
     <ds:schemaRef ds:uri="http://purl.org/dc/elements/1.1/"/>
-    <ds:schemaRef ds:uri="16c05727-aa75-4e4a-9b5f-8a80a1165891"/>
-    <ds:schemaRef ds:uri="http://schemas.microsoft.com/office/2006/metadata/properties"/>
-    <ds:schemaRef ds:uri="http://schemas.microsoft.com/office/2006/documentManagement/types"/>
-    <ds:schemaRef ds:uri="http://www.w3.org/XML/1998/namespace"/>
-    <ds:schemaRef ds:uri="71af3243-3dd4-4a8d-8c0d-dd76da1f02a5"/>
-    <ds:schemaRef ds:uri="http://schemas.microsoft.com/office/infopath/2007/PartnerControls"/>
     <ds:schemaRef ds:uri="http://schemas.openxmlformats.org/package/2006/metadata/core-properties"/>
     <ds:schemaRef ds:uri="230e9df3-be65-4c73-a93b-d1236ebd677e"/>
-    <ds:schemaRef ds:uri="http://schemas.microsoft.com/sharepoint/v3"/>
+    <ds:schemaRef ds:uri="http://schemas.microsoft.com/office/2006/metadata/properties"/>
   </ds:schemaRefs>
 </ds:datastoreItem>
 </file>
